--- a/week01/source/lecture01.pptx
+++ b/week01/source/lecture01.pptx
@@ -40495,8 +40495,8 @@
           <p:nvPr/>
         </p:nvGraphicFramePr>
         <p:xfrm>
-          <a:off xmlns:a="http://schemas.openxmlformats.org/drawingml/2006/main" x="590550" y="3762375"/>
-          <a:ext xmlns:a="http://schemas.openxmlformats.org/drawingml/2006/main" cx="6343650" cy="2371725"/>
+          <a:off xmlns:a="http://schemas.openxmlformats.org/drawingml/2006/main" x="590550" y="3945255"/>
+          <a:ext xmlns:a="http://schemas.openxmlformats.org/drawingml/2006/main" cx="6343650" cy="2188845"/>
         </p:xfrm>
         <a:graphic xmlns:a="http://schemas.openxmlformats.org/drawingml/2006/main">
           <a:graphicData uri="http://schemas.openxmlformats.org/drawingml/2006/chart">
